--- a/src/my_python_library/assets/files/ticket_01/ticket_1_question_1_presentation.pptx
+++ b/src/my_python_library/assets/files/ticket_01/ticket_1_question_1_presentation.pptx
@@ -7,8 +7,103 @@
   <p:sldIdLst>
     <p:sldId id="256" r:id="rId2"/>
   </p:sldIdLst>
-  <p:sldSz cx="12192000" cy="6858000" type="screen16x9"/>
+  <p:sldSz cx="12192000" cy="6858000"/>
   <p:notesSz cx="6858000" cy="9144000"/>
+  <p:defaultTextStyle>
+    <a:defPPr>
+      <a:defRPr lang="ru-RU"/>
+    </a:defPPr>
+    <a:lvl1pPr marL="0" algn="l" defTabSz="914400" rtl="0" eaLnBrk="1" latinLnBrk="0" hangingPunct="1">
+      <a:defRPr sz="1800" kern="1200">
+        <a:solidFill>
+          <a:schemeClr val="tx1"/>
+        </a:solidFill>
+        <a:latin typeface="+mn-lt"/>
+        <a:ea typeface="+mn-ea"/>
+        <a:cs typeface="+mn-cs"/>
+      </a:defRPr>
+    </a:lvl1pPr>
+    <a:lvl2pPr marL="457200" algn="l" defTabSz="914400" rtl="0" eaLnBrk="1" latinLnBrk="0" hangingPunct="1">
+      <a:defRPr sz="1800" kern="1200">
+        <a:solidFill>
+          <a:schemeClr val="tx1"/>
+        </a:solidFill>
+        <a:latin typeface="+mn-lt"/>
+        <a:ea typeface="+mn-ea"/>
+        <a:cs typeface="+mn-cs"/>
+      </a:defRPr>
+    </a:lvl2pPr>
+    <a:lvl3pPr marL="914400" algn="l" defTabSz="914400" rtl="0" eaLnBrk="1" latinLnBrk="0" hangingPunct="1">
+      <a:defRPr sz="1800" kern="1200">
+        <a:solidFill>
+          <a:schemeClr val="tx1"/>
+        </a:solidFill>
+        <a:latin typeface="+mn-lt"/>
+        <a:ea typeface="+mn-ea"/>
+        <a:cs typeface="+mn-cs"/>
+      </a:defRPr>
+    </a:lvl3pPr>
+    <a:lvl4pPr marL="1371600" algn="l" defTabSz="914400" rtl="0" eaLnBrk="1" latinLnBrk="0" hangingPunct="1">
+      <a:defRPr sz="1800" kern="1200">
+        <a:solidFill>
+          <a:schemeClr val="tx1"/>
+        </a:solidFill>
+        <a:latin typeface="+mn-lt"/>
+        <a:ea typeface="+mn-ea"/>
+        <a:cs typeface="+mn-cs"/>
+      </a:defRPr>
+    </a:lvl4pPr>
+    <a:lvl5pPr marL="1828800" algn="l" defTabSz="914400" rtl="0" eaLnBrk="1" latinLnBrk="0" hangingPunct="1">
+      <a:defRPr sz="1800" kern="1200">
+        <a:solidFill>
+          <a:schemeClr val="tx1"/>
+        </a:solidFill>
+        <a:latin typeface="+mn-lt"/>
+        <a:ea typeface="+mn-ea"/>
+        <a:cs typeface="+mn-cs"/>
+      </a:defRPr>
+    </a:lvl5pPr>
+    <a:lvl6pPr marL="2286000" algn="l" defTabSz="914400" rtl="0" eaLnBrk="1" latinLnBrk="0" hangingPunct="1">
+      <a:defRPr sz="1800" kern="1200">
+        <a:solidFill>
+          <a:schemeClr val="tx1"/>
+        </a:solidFill>
+        <a:latin typeface="+mn-lt"/>
+        <a:ea typeface="+mn-ea"/>
+        <a:cs typeface="+mn-cs"/>
+      </a:defRPr>
+    </a:lvl6pPr>
+    <a:lvl7pPr marL="2743200" algn="l" defTabSz="914400" rtl="0" eaLnBrk="1" latinLnBrk="0" hangingPunct="1">
+      <a:defRPr sz="1800" kern="1200">
+        <a:solidFill>
+          <a:schemeClr val="tx1"/>
+        </a:solidFill>
+        <a:latin typeface="+mn-lt"/>
+        <a:ea typeface="+mn-ea"/>
+        <a:cs typeface="+mn-cs"/>
+      </a:defRPr>
+    </a:lvl7pPr>
+    <a:lvl8pPr marL="3200400" algn="l" defTabSz="914400" rtl="0" eaLnBrk="1" latinLnBrk="0" hangingPunct="1">
+      <a:defRPr sz="1800" kern="1200">
+        <a:solidFill>
+          <a:schemeClr val="tx1"/>
+        </a:solidFill>
+        <a:latin typeface="+mn-lt"/>
+        <a:ea typeface="+mn-ea"/>
+        <a:cs typeface="+mn-cs"/>
+      </a:defRPr>
+    </a:lvl8pPr>
+    <a:lvl9pPr marL="3657600" algn="l" defTabSz="914400" rtl="0" eaLnBrk="1" latinLnBrk="0" hangingPunct="1">
+      <a:defRPr sz="1800" kern="1200">
+        <a:solidFill>
+          <a:schemeClr val="tx1"/>
+        </a:solidFill>
+        <a:latin typeface="+mn-lt"/>
+        <a:ea typeface="+mn-ea"/>
+        <a:cs typeface="+mn-cs"/>
+      </a:defRPr>
+    </a:lvl9pPr>
+  </p:defaultTextStyle>
 </p:presentation>
 </file>
 
@@ -40,6 +135,11 @@
 <file path=ppt/slideMasters/slideMaster1.xml><?xml version="1.0" encoding="utf-8"?>
 <p:sldMaster xmlns:a="http://schemas.openxmlformats.org/drawingml/2006/main" xmlns:r="http://schemas.openxmlformats.org/officeDocument/2006/relationships" xmlns:p="http://schemas.openxmlformats.org/presentationml/2006/main">
   <p:cSld>
+    <p:bg>
+      <p:bgRef idx="1001">
+        <a:schemeClr val="bg1"/>
+      </p:bgRef>
+    </p:bg>
     <p:spTree>
       <p:nvGrpSpPr>
         <p:cNvPr id="1" name=""/>
@@ -76,6 +176,7 @@
         <a:solidFill>
           <a:srgbClr val="F8FAFC"/>
         </a:solidFill>
+        <a:effectLst/>
       </p:bgPr>
     </p:bg>
     <p:spTree>
@@ -109,13 +210,33 @@
           <a:lstStyle/>
           <a:p>
             <a:r>
-              <a:rPr lang="ru-RU" sz="4200" b="1">
+              <a:rPr lang="ru-RU" sz="4200" b="1" dirty="0">
                 <a:solidFill>
                   <a:srgbClr val="1E293B"/>
                 </a:solidFill>
               </a:rPr>
-              <a:t>????? 1. ?????? 1</a:t>
+              <a:t>Первая </a:t>
             </a:r>
+            <a:r>
+              <a:rPr lang="ru-RU" sz="4200" b="1" dirty="0" err="1">
+                <a:solidFill>
+                  <a:srgbClr val="1E293B"/>
+                </a:solidFill>
+              </a:rPr>
+              <a:t>преза</a:t>
+            </a:r>
+            <a:endParaRPr lang="ru-RU" sz="4200" b="1" dirty="0">
+              <a:solidFill>
+                <a:srgbClr val="1E293B"/>
+              </a:solidFill>
+            </a:endParaRPr>
+          </a:p>
+          <a:p>
+            <a:endParaRPr lang="ru-RU" sz="4200" b="1" dirty="0">
+              <a:solidFill>
+                <a:srgbClr val="1E293B"/>
+              </a:solidFill>
+            </a:endParaRPr>
           </a:p>
         </p:txBody>
       </p:sp>
@@ -136,12 +257,12 @@
           <a:lstStyle/>
           <a:p>
             <a:r>
-              <a:rPr lang="ru-RU" sz="2800">
+              <a:rPr lang="ru-RU" sz="2800" dirty="0">
                 <a:solidFill>
                   <a:srgbClr val="475569"/>
                 </a:solidFill>
               </a:rPr>
-              <a:t>???????? ???? ?????? ? ???????? ????????</a:t>
+              <a:t>Тест</a:t>
             </a:r>
           </a:p>
         </p:txBody>
@@ -162,54 +283,8 @@
           <a:bodyPr/>
           <a:lstStyle/>
           <a:p>
-            <a:pPr marL="0" indent="0">
-              <a:buChar char="?"/>
-            </a:pPr>
-            <a:r>
-              <a:rPr lang="ru-RU" sz="2600"/>
-              <a:t>????????? ??????</a:t>
-            </a:r>
-            <a:endParaRPr lang="ru-RU" sz="2600"/>
-          </a:p>
-          <a:p>
-            <a:pPr marL="0" indent="0">
-              <a:buChar char="?"/>
-            </a:pPr>
-            <a:r>
-              <a:rPr lang="ru-RU" sz="2600"/>
-              <a:t>????????? ??????</a:t>
-            </a:r>
-            <a:endParaRPr lang="ru-RU" sz="2600"/>
-          </a:p>
-          <a:p>
-            <a:pPr marL="0" indent="0">
-              <a:buChar char="?"/>
-            </a:pPr>
-            <a:r>
-              <a:rPr lang="ru-RU" sz="2600"/>
-              <a:t>???????????</a:t>
-            </a:r>
-            <a:endParaRPr lang="ru-RU" sz="2600"/>
-          </a:p>
-          <a:p>
-            <a:pPr marL="0" indent="0">
-              <a:buChar char="?"/>
-            </a:pPr>
-            <a:r>
-              <a:rPr lang="ru-RU" sz="2600"/>
-              <a:t>????? ? ?????</a:t>
-            </a:r>
-            <a:endParaRPr lang="ru-RU" sz="2600"/>
-          </a:p>
-          <a:p>
-            <a:pPr marL="0" indent="0">
-              <a:buChar char="?"/>
-            </a:pPr>
-            <a:r>
-              <a:rPr lang="ru-RU" sz="2600"/>
-              <a:t>????????? ????</a:t>
-            </a:r>
-            <a:endParaRPr lang="ru-RU" sz="2600"/>
+            <a:pPr marL="0" indent="0"/>
+            <a:endParaRPr lang="ru-RU" sz="2600" dirty="0"/>
           </a:p>
         </p:txBody>
       </p:sp>
@@ -222,84 +297,316 @@
 </file>
 
 <file path=ppt/theme/theme1.xml><?xml version="1.0" encoding="utf-8"?>
-<a:theme xmlns:a="http://schemas.openxmlformats.org/drawingml/2006/main" name="ISTCode">
+<a:theme xmlns:a="http://schemas.openxmlformats.org/drawingml/2006/main" name="Тема Office">
   <a:themeElements>
-    <a:clrScheme name="ISTCode">
+    <a:clrScheme name="Стандартная">
       <a:dk1>
-        <a:srgbClr val="1E293B"/>
+        <a:sysClr val="windowText" lastClr="000000"/>
       </a:dk1>
       <a:lt1>
-        <a:srgbClr val="F8FAFC"/>
+        <a:sysClr val="window" lastClr="FFFFFF"/>
       </a:lt1>
       <a:dk2>
-        <a:srgbClr val="334155"/>
+        <a:srgbClr val="0E2841"/>
       </a:dk2>
       <a:lt2>
-        <a:srgbClr val="E2E8F0"/>
+        <a:srgbClr val="E8E8E8"/>
       </a:lt2>
       <a:accent1>
-        <a:srgbClr val="3B82F6"/>
+        <a:srgbClr val="156082"/>
       </a:accent1>
       <a:accent2>
-        <a:srgbClr val="10B981"/>
+        <a:srgbClr val="E97132"/>
       </a:accent2>
       <a:accent3>
-        <a:srgbClr val="F59E0B"/>
+        <a:srgbClr val="196B24"/>
       </a:accent3>
       <a:accent4>
-        <a:srgbClr val="8B5CF6"/>
+        <a:srgbClr val="0F9ED5"/>
       </a:accent4>
       <a:accent5>
-        <a:srgbClr val="EF4444"/>
+        <a:srgbClr val="A02B93"/>
       </a:accent5>
       <a:accent6>
-        <a:srgbClr val="0EA5E9"/>
+        <a:srgbClr val="4EA72E"/>
       </a:accent6>
       <a:hlink>
-        <a:srgbClr val="2563EB"/>
+        <a:srgbClr val="467886"/>
       </a:hlink>
       <a:folHlink>
-        <a:srgbClr val="7C3AED"/>
+        <a:srgbClr val="96607D"/>
       </a:folHlink>
     </a:clrScheme>
-    <a:fontScheme name="ISTCode">
+    <a:fontScheme name="Стандартная">
       <a:majorFont>
-        <a:latin typeface="Aptos Display"/>
+        <a:latin typeface="Aptos Display" panose="02110004020202020204"/>
         <a:ea typeface=""/>
         <a:cs typeface=""/>
+        <a:font script="Jpan" typeface="游ゴシック Light"/>
+        <a:font script="Hang" typeface="맑은 고딕"/>
+        <a:font script="Hans" typeface="等线 Light"/>
+        <a:font script="Hant" typeface="新細明體"/>
+        <a:font script="Arab" typeface="Times New Roman"/>
+        <a:font script="Hebr" typeface="Times New Roman"/>
+        <a:font script="Thai" typeface="Angsana New"/>
+        <a:font script="Ethi" typeface="Nyala"/>
+        <a:font script="Beng" typeface="Vrinda"/>
+        <a:font script="Gujr" typeface="Shruti"/>
+        <a:font script="Khmr" typeface="MoolBoran"/>
+        <a:font script="Knda" typeface="Tunga"/>
+        <a:font script="Guru" typeface="Raavi"/>
+        <a:font script="Cans" typeface="Euphemia"/>
+        <a:font script="Cher" typeface="Plantagenet Cherokee"/>
+        <a:font script="Yiii" typeface="Microsoft Yi Baiti"/>
+        <a:font script="Tibt" typeface="Microsoft Himalaya"/>
+        <a:font script="Thaa" typeface="MV Boli"/>
+        <a:font script="Deva" typeface="Mangal"/>
+        <a:font script="Telu" typeface="Gautami"/>
+        <a:font script="Taml" typeface="Latha"/>
+        <a:font script="Syrc" typeface="Estrangelo Edessa"/>
+        <a:font script="Orya" typeface="Kalinga"/>
+        <a:font script="Mlym" typeface="Kartika"/>
+        <a:font script="Laoo" typeface="DokChampa"/>
+        <a:font script="Sinh" typeface="Iskoola Pota"/>
+        <a:font script="Mong" typeface="Mongolian Baiti"/>
+        <a:font script="Viet" typeface="Times New Roman"/>
+        <a:font script="Uigh" typeface="Microsoft Uighur"/>
+        <a:font script="Geor" typeface="Sylfaen"/>
+        <a:font script="Armn" typeface="Arial"/>
+        <a:font script="Bugi" typeface="Leelawadee UI"/>
+        <a:font script="Bopo" typeface="Microsoft JhengHei"/>
+        <a:font script="Java" typeface="Javanese Text"/>
+        <a:font script="Lisu" typeface="Segoe UI"/>
+        <a:font script="Mymr" typeface="Myanmar Text"/>
+        <a:font script="Nkoo" typeface="Ebrima"/>
+        <a:font script="Olck" typeface="Nirmala UI"/>
+        <a:font script="Osma" typeface="Ebrima"/>
+        <a:font script="Phag" typeface="Phagspa"/>
+        <a:font script="Syrn" typeface="Estrangelo Edessa"/>
+        <a:font script="Syrj" typeface="Estrangelo Edessa"/>
+        <a:font script="Syre" typeface="Estrangelo Edessa"/>
+        <a:font script="Sora" typeface="Nirmala UI"/>
+        <a:font script="Tale" typeface="Microsoft Tai Le"/>
+        <a:font script="Talu" typeface="Microsoft New Tai Lue"/>
+        <a:font script="Tfng" typeface="Ebrima"/>
       </a:majorFont>
       <a:minorFont>
-        <a:latin typeface="Aptos"/>
+        <a:latin typeface="Aptos" panose="02110004020202020204"/>
         <a:ea typeface=""/>
         <a:cs typeface=""/>
+        <a:font script="Jpan" typeface="游ゴシック"/>
+        <a:font script="Hang" typeface="맑은 고딕"/>
+        <a:font script="Hans" typeface="等线"/>
+        <a:font script="Hant" typeface="新細明體"/>
+        <a:font script="Arab" typeface="Arial"/>
+        <a:font script="Hebr" typeface="Arial"/>
+        <a:font script="Thai" typeface="Cordia New"/>
+        <a:font script="Ethi" typeface="Nyala"/>
+        <a:font script="Beng" typeface="Vrinda"/>
+        <a:font script="Gujr" typeface="Shruti"/>
+        <a:font script="Khmr" typeface="DaunPenh"/>
+        <a:font script="Knda" typeface="Tunga"/>
+        <a:font script="Guru" typeface="Raavi"/>
+        <a:font script="Cans" typeface="Euphemia"/>
+        <a:font script="Cher" typeface="Plantagenet Cherokee"/>
+        <a:font script="Yiii" typeface="Microsoft Yi Baiti"/>
+        <a:font script="Tibt" typeface="Microsoft Himalaya"/>
+        <a:font script="Thaa" typeface="MV Boli"/>
+        <a:font script="Deva" typeface="Mangal"/>
+        <a:font script="Telu" typeface="Gautami"/>
+        <a:font script="Taml" typeface="Latha"/>
+        <a:font script="Syrc" typeface="Estrangelo Edessa"/>
+        <a:font script="Orya" typeface="Kalinga"/>
+        <a:font script="Mlym" typeface="Kartika"/>
+        <a:font script="Laoo" typeface="DokChampa"/>
+        <a:font script="Sinh" typeface="Iskoola Pota"/>
+        <a:font script="Mong" typeface="Mongolian Baiti"/>
+        <a:font script="Viet" typeface="Arial"/>
+        <a:font script="Uigh" typeface="Microsoft Uighur"/>
+        <a:font script="Geor" typeface="Sylfaen"/>
+        <a:font script="Armn" typeface="Arial"/>
+        <a:font script="Bugi" typeface="Leelawadee UI"/>
+        <a:font script="Bopo" typeface="Microsoft JhengHei"/>
+        <a:font script="Java" typeface="Javanese Text"/>
+        <a:font script="Lisu" typeface="Segoe UI"/>
+        <a:font script="Mymr" typeface="Myanmar Text"/>
+        <a:font script="Nkoo" typeface="Ebrima"/>
+        <a:font script="Olck" typeface="Nirmala UI"/>
+        <a:font script="Osma" typeface="Ebrima"/>
+        <a:font script="Phag" typeface="Phagspa"/>
+        <a:font script="Syrn" typeface="Estrangelo Edessa"/>
+        <a:font script="Syrj" typeface="Estrangelo Edessa"/>
+        <a:font script="Syre" typeface="Estrangelo Edessa"/>
+        <a:font script="Sora" typeface="Nirmala UI"/>
+        <a:font script="Tale" typeface="Microsoft Tai Le"/>
+        <a:font script="Talu" typeface="Microsoft New Tai Lue"/>
+        <a:font script="Tfng" typeface="Ebrima"/>
       </a:minorFont>
     </a:fontScheme>
-    <a:fmtScheme name="ISTCode">
+    <a:fmtScheme name="Стандартная">
       <a:fillStyleLst>
         <a:solidFill>
           <a:schemeClr val="phClr"/>
         </a:solidFill>
+        <a:gradFill rotWithShape="1">
+          <a:gsLst>
+            <a:gs pos="0">
+              <a:schemeClr val="phClr">
+                <a:lumMod val="110000"/>
+                <a:satMod val="105000"/>
+                <a:tint val="67000"/>
+              </a:schemeClr>
+            </a:gs>
+            <a:gs pos="50000">
+              <a:schemeClr val="phClr">
+                <a:lumMod val="105000"/>
+                <a:satMod val="103000"/>
+                <a:tint val="73000"/>
+              </a:schemeClr>
+            </a:gs>
+            <a:gs pos="100000">
+              <a:schemeClr val="phClr">
+                <a:lumMod val="105000"/>
+                <a:satMod val="109000"/>
+                <a:tint val="81000"/>
+              </a:schemeClr>
+            </a:gs>
+          </a:gsLst>
+          <a:lin ang="5400000" scaled="0"/>
+        </a:gradFill>
+        <a:gradFill rotWithShape="1">
+          <a:gsLst>
+            <a:gs pos="0">
+              <a:schemeClr val="phClr">
+                <a:satMod val="103000"/>
+                <a:lumMod val="102000"/>
+                <a:tint val="94000"/>
+              </a:schemeClr>
+            </a:gs>
+            <a:gs pos="50000">
+              <a:schemeClr val="phClr">
+                <a:satMod val="110000"/>
+                <a:lumMod val="100000"/>
+                <a:shade val="100000"/>
+              </a:schemeClr>
+            </a:gs>
+            <a:gs pos="100000">
+              <a:schemeClr val="phClr">
+                <a:lumMod val="99000"/>
+                <a:satMod val="120000"/>
+                <a:shade val="78000"/>
+              </a:schemeClr>
+            </a:gs>
+          </a:gsLst>
+          <a:lin ang="5400000" scaled="0"/>
+        </a:gradFill>
       </a:fillStyleLst>
       <a:lnStyleLst>
-        <a:ln w="6350">
+        <a:ln w="12700" cap="flat" cmpd="sng" algn="ctr">
           <a:solidFill>
             <a:schemeClr val="phClr"/>
           </a:solidFill>
+          <a:prstDash val="solid"/>
+          <a:miter lim="800000"/>
+        </a:ln>
+        <a:ln w="19050" cap="flat" cmpd="sng" algn="ctr">
+          <a:solidFill>
+            <a:schemeClr val="phClr"/>
+          </a:solidFill>
+          <a:prstDash val="solid"/>
+          <a:miter lim="800000"/>
+        </a:ln>
+        <a:ln w="25400" cap="flat" cmpd="sng" algn="ctr">
+          <a:solidFill>
+            <a:schemeClr val="phClr"/>
+          </a:solidFill>
+          <a:prstDash val="solid"/>
+          <a:miter lim="800000"/>
         </a:ln>
       </a:lnStyleLst>
       <a:effectStyleLst>
         <a:effectStyle>
           <a:effectLst/>
         </a:effectStyle>
+        <a:effectStyle>
+          <a:effectLst/>
+        </a:effectStyle>
+        <a:effectStyle>
+          <a:effectLst>
+            <a:outerShdw blurRad="57150" dist="19050" dir="5400000" algn="ctr" rotWithShape="0">
+              <a:srgbClr val="000000">
+                <a:alpha val="63000"/>
+              </a:srgbClr>
+            </a:outerShdw>
+          </a:effectLst>
+        </a:effectStyle>
       </a:effectStyleLst>
       <a:bgFillStyleLst>
         <a:solidFill>
           <a:schemeClr val="phClr"/>
         </a:solidFill>
+        <a:solidFill>
+          <a:schemeClr val="phClr">
+            <a:tint val="95000"/>
+            <a:satMod val="170000"/>
+          </a:schemeClr>
+        </a:solidFill>
+        <a:gradFill rotWithShape="1">
+          <a:gsLst>
+            <a:gs pos="0">
+              <a:schemeClr val="phClr">
+                <a:tint val="93000"/>
+                <a:satMod val="150000"/>
+                <a:shade val="98000"/>
+                <a:lumMod val="102000"/>
+              </a:schemeClr>
+            </a:gs>
+            <a:gs pos="50000">
+              <a:schemeClr val="phClr">
+                <a:tint val="98000"/>
+                <a:satMod val="130000"/>
+                <a:shade val="90000"/>
+                <a:lumMod val="103000"/>
+              </a:schemeClr>
+            </a:gs>
+            <a:gs pos="100000">
+              <a:schemeClr val="phClr">
+                <a:shade val="63000"/>
+                <a:satMod val="120000"/>
+              </a:schemeClr>
+            </a:gs>
+          </a:gsLst>
+          <a:lin ang="5400000" scaled="0"/>
+        </a:gradFill>
       </a:bgFillStyleLst>
     </a:fmtScheme>
   </a:themeElements>
-  <a:objectDefaults/>
+  <a:objectDefaults>
+    <a:lnDef>
+      <a:spPr/>
+      <a:bodyPr/>
+      <a:lstStyle/>
+      <a:style>
+        <a:lnRef idx="2">
+          <a:schemeClr val="accent1"/>
+        </a:lnRef>
+        <a:fillRef idx="0">
+          <a:schemeClr val="accent1"/>
+        </a:fillRef>
+        <a:effectRef idx="1">
+          <a:schemeClr val="accent1"/>
+        </a:effectRef>
+        <a:fontRef idx="minor">
+          <a:schemeClr val="tx1"/>
+        </a:fontRef>
+      </a:style>
+    </a:lnDef>
+  </a:objectDefaults>
   <a:extraClrSchemeLst/>
+  <a:extLst>
+    <a:ext uri="{05A4C25C-085E-4340-85A3-A5531E510DB2}">
+      <thm15:themeFamily xmlns:thm15="http://schemas.microsoft.com/office/thememl/2012/main" name="Office Theme" id="{2E142A2C-CD16-42D6-873A-C26D2A0506FA}" vid="{1BDDFF52-6CD6-40A5-AB3C-68EB2F1E4D0A}"/>
+    </a:ext>
+  </a:extLst>
 </a:theme>
 </file>